--- a/level3/slides/Level3_Lesson8_Slides.pptx
+++ b/level3/slides/Level3_Lesson8_Slides.pptx
@@ -1296,7 +1296,7 @@
           </a:p>
           <a:p>
             <a:r>
-              <a:t>The audio (about 1:15) is coming soon. When it is ready, it plays the conversation once; press play again for play 2. Until then, read the listening script (at the end of these notes) with a volunteer.</a:t>
+              <a:t>The audio (L3_L8_listening.mp3, about 1:17) plays the conversation once. Press play again for play 2. A third play is fine if the class needs it.</a:t>
             </a:r>
           </a:p>
           <a:p>
@@ -1306,7 +1306,7 @@
           </a:p>
           <a:p>
             <a:r>
-              <a:t>Audio: the listening audio for this lesson (about 1:15) is coming soon. It will use computer-generated voices (Chatterbox TTS cloned from synthetic Kokoro-82M reference clips); no recordings of real people. Until it is ready, read the listening script (in the notes of the Before You Listen slide) with a volunteer. The names and the story are invented.</a:t>
+              <a:t>Audio: synthetic voices, computer-generated (Chatterbox TTS cloned from Kokoro-82M reference clips). No recordings of real people. The names and the story are invented.</a:t>
             </a:r>
           </a:p>
           <a:p>
@@ -1317,96 +1317,6 @@
           <a:p>
             <a:r>
               <a:t>Picture: Twemoji graphics by Twitter, Inc. and other contributors (https://github.com/jdecked/twemoji), CC BY 4.0 (https://creativecommons.org/licenses/by/4.0/); resized and combined, with speech bubbles, signs, and labels (images/CREDITS.md).</a:t>
-            </a:r>
-          </a:p>
-          <a:p>
-            <a:r>
-              <a:t>Listening script (the audio is coming soon; until then, read it aloud with a volunteer at a normal, friendly speed):</a:t>
-            </a:r>
-          </a:p>
-          <a:p>
-            <a:r>
-              <a:t>Narrator: Lesson eight. Listening. David lost something on the bus. He's calling the lost and found. Listen.</a:t>
-            </a:r>
-          </a:p>
-          <a:p>
-            <a:r>
-              <a:t>Joan: City Bus, Lost and Found. How can I help you?</a:t>
-            </a:r>
-          </a:p>
-          <a:p>
-            <a:r>
-              <a:t>David: Hi. I lost my backpack on the bus this morning.</a:t>
-            </a:r>
-          </a:p>
-          <a:p>
-            <a:r>
-              <a:t>Joan: OK. Can you describe it?</a:t>
-            </a:r>
-          </a:p>
-          <a:p>
-            <a:r>
-              <a:t>David: It's a big blue backpack with a black zipper. My brother has the same one, but his is green.</a:t>
-            </a:r>
-          </a:p>
-          <a:p>
-            <a:r>
-              <a:t>Joan: What was inside?</a:t>
-            </a:r>
-          </a:p>
-          <a:p>
-            <a:r>
-              <a:t>David: My headphones, a red scarf, and some gloves.</a:t>
-            </a:r>
-          </a:p>
-          <a:p>
-            <a:r>
-              <a:t>Joan: And what were you doing when you lost it?</a:t>
-            </a:r>
-          </a:p>
-          <a:p>
-            <a:r>
-              <a:t>David: I was talking on the phone. I got off at Park Street, and I left it on the seat.</a:t>
-            </a:r>
-          </a:p>
-          <a:p>
-            <a:r>
-              <a:t>Joan: Let me check. We have two blue backpacks. One is small, and one is big.</a:t>
-            </a:r>
-          </a:p>
-          <a:p>
-            <a:r>
-              <a:t>David: The big one is mine.</a:t>
-            </a:r>
-          </a:p>
-          <a:p>
-            <a:r>
-              <a:t>Joan: There are white headphones inside. Are they yours?</a:t>
-            </a:r>
-          </a:p>
-          <a:p>
-            <a:r>
-              <a:t>David: No, mine are black. Those aren't mine.</a:t>
-            </a:r>
-          </a:p>
-          <a:p>
-            <a:r>
-              <a:t>Joan: Wait. Here's another big one, with black headphones and a red scarf.</a:t>
-            </a:r>
-          </a:p>
-          <a:p>
-            <a:r>
-              <a:t>David: Yes! That's mine. Thank you!</a:t>
-            </a:r>
-          </a:p>
-          <a:p>
-            <a:r>
-              <a:t>Joan: You're welcome. You can pick it up today before five.</a:t>
-            </a:r>
-          </a:p>
-          <a:p>
-            <a:r>
-              <a:t>Narrator: That's the end of the listening.</a:t>
             </a:r>
           </a:p>
         </p:txBody>
@@ -2891,7 +2801,7 @@
           </a:p>
           <a:p>
             <a:r>
-              <a:t>Audio: the listening audio for this lesson (about 1:15) is coming soon. It will use computer-generated voices (Chatterbox TTS cloned from synthetic Kokoro-82M reference clips); no recordings of real people. Until it is ready, read the listening script (in the notes of the Before You Listen slide) with a volunteer. The names and the story are invented.</a:t>
+              <a:t>Audio: synthetic voices, computer-generated (Chatterbox TTS cloned from Kokoro-82M reference clips). No recordings of real people. The names and the story are invented.</a:t>
             </a:r>
           </a:p>
           <a:p>
@@ -12458,7 +12368,7 @@
                 <a:ea typeface="Lexend Deca" pitchFamily="34" charset="-122"/>
                 <a:cs typeface="Lexend Deca" pitchFamily="34" charset="-120"/>
               </a:rPr>
-              <a:t>Audio: about 1:15. It plays once.</a:t>
+              <a:t>Audio: about 1:17. It plays once.</a:t>
             </a:r>
             <a:endParaRPr lang="en-US" sz="2200" dirty="0"/>
           </a:p>
@@ -31470,7 +31380,7 @@
                 <a:ea typeface="Lexend Deca" pitchFamily="34" charset="-122"/>
                 <a:cs typeface="Lexend Deca" pitchFamily="34" charset="-120"/>
               </a:rPr>
-              <a:t>Audio (coming soon): synthetic voices made with Chatterbox TTS (MIT License), cloned from short synthetic reference clips made with Kokoro-82M (Apache License 2.0). No recordings of real people. Each file will carry an inaudible Perth watermark marking it as AI-generated. Font: Lexend Deca (OFL 1.1).</a:t>
+              <a:t>Audio: synthetic voices made with Chatterbox TTS (MIT License), cloned from short synthetic reference clips made with Kokoro-82M (Apache License 2.0). No recordings of real people were used. Each file carries an inaudible Perth watermark marking it as AI-generated. Font: Lexend Deca (OFL 1.1).</a:t>
             </a:r>
             <a:endParaRPr lang="en-US" sz="1350" dirty="0" b="0"/>
           </a:p>
